--- a/entregables-feat-02/04_presentaciones/Tutorial_softphone_externo.pptx
+++ b/entregables-feat-02/04_presentaciones/Tutorial_softphone_externo.pptx
@@ -112,7 +112,7 @@
   <p:extLst>
     <p:ext uri="{521415D9-36F7-43E2-AB2F-B90AF26B5E84}">
       <p14:sectionLst xmlns:p14="http://schemas.microsoft.com/office/powerpoint/2010/main">
-        <p14:section name="Tutorial" id="{dc12a4c7-1d37-0238-5ffb-e5d92fd00bd2}">
+        <p14:section name="Tutorial" id="{6fa17b57-3d2a-3d45-cdf8-ce3213278100}">
           <p14:sldIdLst>
             <p14:sldId id="256"/>
             <p14:sldId id="257"/>
